--- a/decks/geog-asia-china/geog-asia-china_ch2_mapping-china.pptx
+++ b/decks/geog-asia-china/geog-asia-china_ch2_mapping-china.pptx
@@ -125,30 +125,30 @@
   <p:extLst>
     <p:ext uri="{521415D9-36F7-43E2-AB2F-B90AF26B5E84}">
       <p14:sectionLst xmlns:p14="http://schemas.microsoft.com/office/powerpoint/2010/main">
-        <p14:section name="Opening" id="{46391309-2b0b-fa02-2232-f624604bbe14}">
+        <p14:section name="Opening" id="{ebc54739-654e-2b56-cbac-d732bf0d918c}">
           <p14:sldIdLst>
             <p14:sldId id="256"/>
           </p14:sldIdLst>
         </p14:section>
-        <p14:section name="Gate" id="{32d17184-5581-53cb-ca23-99e4875ec159}">
+        <p14:section name="Gate" id="{6556d0d6-bce2-3ae5-3627-7b5fd64fc167}">
           <p14:sldIdLst>
             <p14:sldId id="257"/>
             <p14:sldId id="258"/>
           </p14:sldIdLst>
         </p14:section>
-        <p14:section name="Pre-teach" id="{65f3be0a-1ea5-5ca8-8005-a66cb1f1b4c0}">
+        <p14:section name="Pre-teach" id="{e8a0bff2-158d-ce0c-ff57-fe18ad954247}">
           <p14:sldIdLst>
             <p14:sldId id="259"/>
             <p14:sldId id="260"/>
           </p14:sldIdLst>
         </p14:section>
-        <p14:section name="Read-along" id="{65426e0a-64f3-63c1-b28f-417a260fdf90}">
+        <p14:section name="Read-along" id="{bd6785f5-88d7-0a91-6914-856b900bb09f}">
           <p14:sldIdLst>
             <p14:sldId id="261"/>
             <p14:sldId id="262"/>
           </p14:sldIdLst>
         </p14:section>
-        <p14:section name="Teach" id="{7d63218f-7783-b84c-14e1-7955082fc931}">
+        <p14:section name="Teach" id="{87dc1257-aa15-917b-cc18-96945b549e5a}">
           <p14:sldIdLst>
             <p14:sldId id="263"/>
             <p14:sldId id="264"/>
@@ -157,19 +157,19 @@
             <p14:sldId id="267"/>
           </p14:sldIdLst>
         </p14:section>
-        <p14:section name="Routes" id="{c28432d3-eca5-4036-e834-44ee191de113}">
+        <p14:section name="Routes" id="{41abb12d-cfbc-23dd-c3b2-796c91c73dbf}">
           <p14:sldIdLst>
             <p14:sldId id="268"/>
             <p14:sldId id="269"/>
             <p14:sldId id="270"/>
           </p14:sldIdLst>
         </p14:section>
-        <p14:section name="Close" id="{37c27dc4-c9b0-90bf-7187-285ab045404d}">
+        <p14:section name="Close" id="{0cda6dbc-c912-01b8-d213-417e60b9deb3}">
           <p14:sldIdLst>
             <p14:sldId id="271"/>
           </p14:sldIdLst>
         </p14:section>
-        <p14:section name="Answers" id="{ae40883e-34d2-8341-b756-e599002ce526}">
+        <p14:section name="Answers" id="{18b0a23c-cf87-7f5c-40bd-90d2a78fdf0a}">
           <p14:sldIdLst>
             <p14:sldId id="272"/>
             <p14:sldId id="273"/>
